--- a/Reporte 051026.pptx
+++ b/Reporte 051026.pptx
@@ -5,7 +5,7 @@
     <p:sldMasterId id="2147483672" r:id="rId1"/>
   </p:sldMasterIdLst>
   <p:notesMasterIdLst>
-    <p:notesMasterId r:id="rId19"/>
+    <p:notesMasterId r:id="rId18"/>
   </p:notesMasterIdLst>
   <p:sldIdLst>
     <p:sldId id="350" r:id="rId2"/>
@@ -22,24 +22,23 @@
     <p:sldId id="361" r:id="rId13"/>
     <p:sldId id="412" r:id="rId14"/>
     <p:sldId id="371" r:id="rId15"/>
-    <p:sldId id="419" r:id="rId16"/>
-    <p:sldId id="413" r:id="rId17"/>
-    <p:sldId id="280" r:id="rId18"/>
+    <p:sldId id="413" r:id="rId16"/>
+    <p:sldId id="280" r:id="rId17"/>
   </p:sldIdLst>
   <p:sldSz cx="9144000" cy="5143500" type="screen16x9"/>
   <p:notesSz cx="6858000" cy="9144000"/>
   <p:embeddedFontLst>
     <p:embeddedFont>
       <p:font typeface="Montserrat" panose="00000500000000000000" pitchFamily="2" charset="0"/>
-      <p:regular r:id="rId20"/>
-      <p:bold r:id="rId21"/>
-      <p:italic r:id="rId22"/>
-      <p:boldItalic r:id="rId23"/>
+      <p:regular r:id="rId19"/>
+      <p:bold r:id="rId20"/>
+      <p:italic r:id="rId21"/>
+      <p:boldItalic r:id="rId22"/>
     </p:embeddedFont>
     <p:embeddedFont>
       <p:font typeface="Montserrat Black" panose="00000A00000000000000" pitchFamily="2" charset="0"/>
-      <p:bold r:id="rId24"/>
-      <p:boldItalic r:id="rId25"/>
+      <p:bold r:id="rId23"/>
+      <p:boldItalic r:id="rId24"/>
     </p:embeddedFont>
   </p:embeddedFontLst>
   <p:defaultTextStyle>
@@ -6551,10 +6550,10 @@
       </p:sp>
       <p:pic>
         <p:nvPicPr>
-          <p:cNvPr id="4" name="Imagen 3">
+          <p:cNvPr id="5" name="Imagen 4">
             <a:extLst>
               <a:ext uri="{FF2B5EF4-FFF2-40B4-BE49-F238E27FC236}">
-                <a16:creationId xmlns:a16="http://schemas.microsoft.com/office/drawing/2014/main" id="{375D2B7D-26B2-86CD-BF3F-89BF5E20CC55}"/>
+                <a16:creationId xmlns:a16="http://schemas.microsoft.com/office/drawing/2014/main" id="{F0F68E3A-A6CA-3DC7-4249-697609BE1A4F}"/>
               </a:ext>
             </a:extLst>
           </p:cNvPr>
@@ -6571,8 +6570,8 @@
         </p:blipFill>
         <p:spPr>
           <a:xfrm>
-            <a:off x="0" y="501904"/>
-            <a:ext cx="9144000" cy="4282568"/>
+            <a:off x="-6725" y="713298"/>
+            <a:ext cx="9144000" cy="3859779"/>
           </a:xfrm>
           <a:prstGeom prst="rect">
             <a:avLst/>
@@ -6657,10 +6656,10 @@
       </p:sp>
       <p:pic>
         <p:nvPicPr>
-          <p:cNvPr id="4" name="Imagen 3">
+          <p:cNvPr id="3" name="Imagen 2">
             <a:extLst>
               <a:ext uri="{FF2B5EF4-FFF2-40B4-BE49-F238E27FC236}">
-                <a16:creationId xmlns:a16="http://schemas.microsoft.com/office/drawing/2014/main" id="{D4A33775-7E18-E986-508B-3299B2C40510}"/>
+                <a16:creationId xmlns:a16="http://schemas.microsoft.com/office/drawing/2014/main" id="{9162A28F-854D-1295-3A54-D6DAF6431C3E}"/>
               </a:ext>
             </a:extLst>
           </p:cNvPr>
@@ -6677,8 +6676,8 @@
         </p:blipFill>
         <p:spPr>
           <a:xfrm>
-            <a:off x="0" y="994311"/>
-            <a:ext cx="9144000" cy="3297753"/>
+            <a:off x="0" y="1143878"/>
+            <a:ext cx="9144000" cy="2998619"/>
           </a:xfrm>
           <a:prstGeom prst="rect">
             <a:avLst/>
@@ -6763,10 +6762,10 @@
       </p:sp>
       <p:pic>
         <p:nvPicPr>
-          <p:cNvPr id="5" name="Imagen 4">
+          <p:cNvPr id="4" name="Imagen 3">
             <a:extLst>
               <a:ext uri="{FF2B5EF4-FFF2-40B4-BE49-F238E27FC236}">
-                <a16:creationId xmlns:a16="http://schemas.microsoft.com/office/drawing/2014/main" id="{622189D9-CCEE-FF84-3E4F-B7CFDB0DF986}"/>
+                <a16:creationId xmlns:a16="http://schemas.microsoft.com/office/drawing/2014/main" id="{74A3FE22-E6E9-70FD-927E-DE3464EC88BE}"/>
               </a:ext>
             </a:extLst>
           </p:cNvPr>
@@ -6783,8 +6782,8 @@
         </p:blipFill>
         <p:spPr>
           <a:xfrm>
-            <a:off x="0" y="816942"/>
-            <a:ext cx="9144000" cy="3652492"/>
+            <a:off x="-6725" y="454109"/>
+            <a:ext cx="9144000" cy="4378158"/>
           </a:xfrm>
           <a:prstGeom prst="rect">
             <a:avLst/>
@@ -6867,36 +6866,44 @@
           </a:p>
         </p:txBody>
       </p:sp>
-      <p:pic>
-        <p:nvPicPr>
-          <p:cNvPr id="4" name="Imagen 3">
+      <p:sp>
+        <p:nvSpPr>
+          <p:cNvPr id="3" name="CuadroTexto 2">
             <a:extLst>
               <a:ext uri="{FF2B5EF4-FFF2-40B4-BE49-F238E27FC236}">
-                <a16:creationId xmlns:a16="http://schemas.microsoft.com/office/drawing/2014/main" id="{AD04E957-F633-E28A-471E-4AFE58F41A2D}"/>
+                <a16:creationId xmlns:a16="http://schemas.microsoft.com/office/drawing/2014/main" id="{E80C92A6-BE2B-AB10-E610-1BFED522DC9B}"/>
               </a:ext>
             </a:extLst>
           </p:cNvPr>
-          <p:cNvPicPr>
-            <a:picLocks noChangeAspect="1"/>
-          </p:cNvPicPr>
+          <p:cNvSpPr txBox="1"/>
           <p:nvPr/>
-        </p:nvPicPr>
-        <p:blipFill>
-          <a:blip r:embed="rId2"/>
-          <a:stretch>
-            <a:fillRect/>
-          </a:stretch>
-        </p:blipFill>
+        </p:nvSpPr>
         <p:spPr>
           <a:xfrm>
-            <a:off x="0" y="970819"/>
-            <a:ext cx="9144000" cy="3344738"/>
+            <a:off x="1699200" y="2255886"/>
+            <a:ext cx="5745600" cy="707886"/>
           </a:xfrm>
           <a:prstGeom prst="rect">
             <a:avLst/>
           </a:prstGeom>
+          <a:noFill/>
         </p:spPr>
-      </p:pic>
+        <p:txBody>
+          <a:bodyPr wrap="square" rtlCol="0">
+            <a:spAutoFit/>
+          </a:bodyPr>
+          <a:lstStyle/>
+          <a:p>
+            <a:pPr algn="ctr"/>
+            <a:r>
+              <a:rPr lang="es-MX" sz="2000" b="1" dirty="0">
+                <a:latin typeface="Montserrat" panose="00000500000000000000" pitchFamily="2" charset="0"/>
+              </a:rPr>
+              <a:t>No se registró información del gobernador en radiodifusoras</a:t>
+            </a:r>
+          </a:p>
+        </p:txBody>
+      </p:sp>
     </p:spTree>
     <p:extLst>
       <p:ext uri="{BB962C8B-B14F-4D97-AF65-F5344CB8AC3E}">
@@ -6975,10 +6982,10 @@
       </p:sp>
       <p:pic>
         <p:nvPicPr>
-          <p:cNvPr id="4" name="Imagen 3">
+          <p:cNvPr id="3" name="Imagen 2">
             <a:extLst>
               <a:ext uri="{FF2B5EF4-FFF2-40B4-BE49-F238E27FC236}">
-                <a16:creationId xmlns:a16="http://schemas.microsoft.com/office/drawing/2014/main" id="{2E74F081-942A-C5A1-55FB-F2657E544767}"/>
+                <a16:creationId xmlns:a16="http://schemas.microsoft.com/office/drawing/2014/main" id="{B974ECA6-5001-06F4-F55F-7C3DF27C8B0A}"/>
               </a:ext>
             </a:extLst>
           </p:cNvPr>
@@ -6995,8 +7002,8 @@
         </p:blipFill>
         <p:spPr>
           <a:xfrm>
-            <a:off x="-1" y="508984"/>
-            <a:ext cx="9144000" cy="4370332"/>
+            <a:off x="0" y="456690"/>
+            <a:ext cx="9144000" cy="4372996"/>
           </a:xfrm>
           <a:prstGeom prst="rect">
             <a:avLst/>
@@ -7017,118 +7024,6 @@
 </file>
 
 <file path=ppt/slides/slide15.xml><?xml version="1.0" encoding="utf-8"?>
-<p:sld xmlns:a="http://schemas.openxmlformats.org/drawingml/2006/main" xmlns:r="http://schemas.openxmlformats.org/officeDocument/2006/relationships" xmlns:p="http://schemas.openxmlformats.org/presentationml/2006/main">
-  <p:cSld>
-    <p:bg>
-      <p:bgPr>
-        <a:solidFill>
-          <a:srgbClr val="F8F9FA"/>
-        </a:solidFill>
-        <a:effectLst/>
-      </p:bgPr>
-    </p:bg>
-    <p:spTree>
-      <p:nvGrpSpPr>
-        <p:cNvPr id="1" name="">
-          <a:extLst>
-            <a:ext uri="{FF2B5EF4-FFF2-40B4-BE49-F238E27FC236}">
-              <a16:creationId xmlns:a16="http://schemas.microsoft.com/office/drawing/2014/main" id="{48D5F8A2-3225-5E40-44C8-4501D2CD9DF1}"/>
-            </a:ext>
-          </a:extLst>
-        </p:cNvPr>
-        <p:cNvGrpSpPr/>
-        <p:nvPr/>
-      </p:nvGrpSpPr>
-      <p:grpSpPr>
-        <a:xfrm>
-          <a:off x="0" y="0"/>
-          <a:ext cx="0" cy="0"/>
-          <a:chOff x="0" y="0"/>
-          <a:chExt cx="0" cy="0"/>
-        </a:xfrm>
-      </p:grpSpPr>
-      <p:sp>
-        <p:nvSpPr>
-          <p:cNvPr id="6" name="CuadroTexto 5">
-            <a:extLst>
-              <a:ext uri="{FF2B5EF4-FFF2-40B4-BE49-F238E27FC236}">
-                <a16:creationId xmlns:a16="http://schemas.microsoft.com/office/drawing/2014/main" id="{41432DDF-F868-30DB-67DD-5C74CE34451C}"/>
-              </a:ext>
-            </a:extLst>
-          </p:cNvPr>
-          <p:cNvSpPr txBox="1"/>
-          <p:nvPr/>
-        </p:nvSpPr>
-        <p:spPr>
-          <a:xfrm>
-            <a:off x="1926166" y="88135"/>
-            <a:ext cx="5291667" cy="307777"/>
-          </a:xfrm>
-          <a:prstGeom prst="rect">
-            <a:avLst/>
-          </a:prstGeom>
-          <a:noFill/>
-        </p:spPr>
-        <p:txBody>
-          <a:bodyPr wrap="square" rtlCol="0">
-            <a:spAutoFit/>
-          </a:bodyPr>
-          <a:lstStyle/>
-          <a:p>
-            <a:pPr algn="ctr"/>
-            <a:r>
-              <a:rPr lang="es-MX" b="1" dirty="0">
-                <a:latin typeface="Montserrat" pitchFamily="2" charset="0"/>
-              </a:rPr>
-              <a:t>Temas de gobierno por radiodifusora</a:t>
-            </a:r>
-          </a:p>
-        </p:txBody>
-      </p:sp>
-      <p:pic>
-        <p:nvPicPr>
-          <p:cNvPr id="3" name="Imagen 2">
-            <a:extLst>
-              <a:ext uri="{FF2B5EF4-FFF2-40B4-BE49-F238E27FC236}">
-                <a16:creationId xmlns:a16="http://schemas.microsoft.com/office/drawing/2014/main" id="{BFE2040E-8172-4BC5-8BDB-8F83FB11E220}"/>
-              </a:ext>
-            </a:extLst>
-          </p:cNvPr>
-          <p:cNvPicPr>
-            <a:picLocks noChangeAspect="1"/>
-          </p:cNvPicPr>
-          <p:nvPr/>
-        </p:nvPicPr>
-        <p:blipFill>
-          <a:blip r:embed="rId2"/>
-          <a:stretch>
-            <a:fillRect/>
-          </a:stretch>
-        </p:blipFill>
-        <p:spPr>
-          <a:xfrm>
-            <a:off x="2000249" y="933450"/>
-            <a:ext cx="5143500" cy="3419475"/>
-          </a:xfrm>
-          <a:prstGeom prst="rect">
-            <a:avLst/>
-          </a:prstGeom>
-        </p:spPr>
-      </p:pic>
-    </p:spTree>
-    <p:extLst>
-      <p:ext uri="{BB962C8B-B14F-4D97-AF65-F5344CB8AC3E}">
-        <p14:creationId xmlns:p14="http://schemas.microsoft.com/office/powerpoint/2010/main" val="1852188135"/>
-      </p:ext>
-    </p:extLst>
-  </p:cSld>
-  <p:clrMapOvr>
-    <a:masterClrMapping/>
-  </p:clrMapOvr>
-</p:sld>
-</file>
-
-<file path=ppt/slides/slide16.xml><?xml version="1.0" encoding="utf-8"?>
 <p:sld xmlns:a="http://schemas.openxmlformats.org/drawingml/2006/main" xmlns:r="http://schemas.openxmlformats.org/officeDocument/2006/relationships" xmlns:p="http://schemas.openxmlformats.org/presentationml/2006/main">
   <p:cSld>
     <p:bg>
@@ -7192,17 +7087,17 @@
               <a:rPr lang="es-MX" b="1" dirty="0">
                 <a:latin typeface="Montserrat" pitchFamily="2" charset="0"/>
               </a:rPr>
-              <a:t>Opinión emitida por radioescuchas</a:t>
+              <a:t>Comentarios emitidos por radioescuchas</a:t>
             </a:r>
           </a:p>
         </p:txBody>
       </p:sp>
       <p:pic>
         <p:nvPicPr>
-          <p:cNvPr id="4" name="Imagen 3">
+          <p:cNvPr id="3" name="Imagen 2">
             <a:extLst>
               <a:ext uri="{FF2B5EF4-FFF2-40B4-BE49-F238E27FC236}">
-                <a16:creationId xmlns:a16="http://schemas.microsoft.com/office/drawing/2014/main" id="{E6432A3F-6253-F7B6-ADAD-FFE5BDBEF32F}"/>
+                <a16:creationId xmlns:a16="http://schemas.microsoft.com/office/drawing/2014/main" id="{D6174850-78E0-1780-3001-E6CE0D9C8A08}"/>
               </a:ext>
             </a:extLst>
           </p:cNvPr>
@@ -7219,8 +7114,8 @@
         </p:blipFill>
         <p:spPr>
           <a:xfrm>
-            <a:off x="2876549" y="995363"/>
-            <a:ext cx="3390900" cy="3295650"/>
+            <a:off x="1666874" y="704850"/>
+            <a:ext cx="5810250" cy="4438650"/>
           </a:xfrm>
           <a:prstGeom prst="rect">
             <a:avLst/>
@@ -7240,7 +7135,7 @@
 </p:sld>
 </file>
 
-<file path=ppt/slides/slide17.xml><?xml version="1.0" encoding="utf-8"?>
+<file path=ppt/slides/slide16.xml><?xml version="1.0" encoding="utf-8"?>
 <p:sld xmlns:a="http://schemas.openxmlformats.org/drawingml/2006/main" xmlns:r="http://schemas.openxmlformats.org/officeDocument/2006/relationships" xmlns:p="http://schemas.openxmlformats.org/presentationml/2006/main">
   <p:cSld>
     <p:spTree>
